--- a/Demo/VSS_Flyer_editable.pptx
+++ b/Demo/VSS_Flyer_editable.pptx
@@ -4,14 +4,14 @@
   <p:sldMasterIdLst>
     <p:sldMasterId id="2147483648" r:id="rId1"/>
   </p:sldMasterIdLst>
+  <p:notesMasterIdLst>
+    <p:notesMasterId r:id="rId3"/>
+  </p:notesMasterIdLst>
   <p:sldIdLst>
     <p:sldId id="256" r:id="rId2"/>
   </p:sldIdLst>
-  <p:notesMasterIdLst>
-    <p:notesMasterId r:id="rId3"/>
-  </p:notesMasterIdLst>
-  <p:sldSz cx="5330952" cy="7562088"/>
-  <p:notesSz cx="7562088" cy="5330952"/>
+  <p:sldSz cx="5330825" cy="7562850"/>
+  <p:notesSz cx="7562850" cy="5330825"/>
   <p:defaultTextStyle>
     <a:lvl1pPr marL="0" algn="l" defTabSz="914400" rtl="0" eaLnBrk="1" latinLnBrk="0" hangingPunct="1">
       <a:defRPr sz="1800" kern="1200">
@@ -104,6 +104,11 @@
       </a:defRPr>
     </a:lvl9pPr>
   </p:defaultTextStyle>
+  <p:extLst>
+    <p:ext uri="{EFAFB233-063F-42B5-8137-9DF3F51BA10A}">
+      <p15:sldGuideLst xmlns:p15="http://schemas.microsoft.com/office/powerpoint/2012/main"/>
+    </p:ext>
+  </p:extLst>
 </p:presentation>
 </file>
 
@@ -129,234 +134,10 @@
           <a:chExt cx="0" cy="0"/>
         </a:xfrm>
       </p:grpSpPr>
-      <p:sp>
-        <p:nvSpPr>
-          <p:cNvPr id="2" name="Header Placeholder 1"/>
-          <p:cNvSpPr>
-            <a:spLocks noGrp="1"/>
-          </p:cNvSpPr>
-          <p:nvPr>
-            <p:ph type="hdr" sz="quarter"/>
-          </p:nvPr>
-        </p:nvSpPr>
-        <p:spPr>
-          <a:xfrm>
-            <a:off x="0" y="0"/>
-            <a:ext cx="2971800" cy="458788"/>
-          </a:xfrm>
-          <a:prstGeom prst="rect">
-            <a:avLst/>
-          </a:prstGeom>
-        </p:spPr>
-        <p:txBody>
-          <a:bodyPr vert="horz" lIns="91440" tIns="45720" rIns="91440" bIns="45720" rtlCol="0"/>
-          <a:lstStyle>
-            <a:lvl1pPr algn="l">
-              <a:defRPr sz="1200"/>
-            </a:lvl1pPr>
-          </a:lstStyle>
-          <a:p>
-            <a:endParaRPr lang="en-US"/>
-          </a:p>
-        </p:txBody>
-      </p:sp>
-      <p:sp>
-        <p:nvSpPr>
-          <p:cNvPr id="3" name="Date Placeholder 2"/>
-          <p:cNvSpPr>
-            <a:spLocks noGrp="1"/>
-          </p:cNvSpPr>
-          <p:nvPr>
-            <p:ph type="dt" idx="1"/>
-          </p:nvPr>
-        </p:nvSpPr>
-        <p:spPr>
-          <a:xfrm>
-            <a:off x="3884613" y="0"/>
-            <a:ext cx="2971800" cy="458788"/>
-          </a:xfrm>
-          <a:prstGeom prst="rect">
-            <a:avLst/>
-          </a:prstGeom>
-        </p:spPr>
-        <p:txBody>
-          <a:bodyPr vert="horz" lIns="91440" tIns="45720" rIns="91440" bIns="45720" rtlCol="0"/>
-          <a:lstStyle>
-            <a:lvl1pPr algn="r">
-              <a:defRPr sz="1200"/>
-            </a:lvl1pPr>
-          </a:lstStyle>
-          <a:p>
-            <a:fld id="{5282F153-3F37-0F45-9E97-73ACFA13230C}" type="datetimeFigureOut">
-              <a:rPr lang="en-US"/>
-              <a:t>7/23/19</a:t>
-            </a:fld>
-            <a:endParaRPr lang="en-US"/>
-          </a:p>
-        </p:txBody>
-      </p:sp>
-      <p:sp>
-        <p:nvSpPr>
-          <p:cNvPr id="4" name="Slide Image Placeholder 3"/>
-          <p:cNvSpPr>
-            <a:spLocks noGrp="1" noRot="1" noChangeAspect="1"/>
-          </p:cNvSpPr>
-          <p:nvPr>
-            <p:ph type="sldImg" idx="2"/>
-          </p:nvPr>
-        </p:nvSpPr>
-        <p:spPr>
-          <a:xfrm>
-            <a:off x="685800" y="1143000"/>
-            <a:ext cx="5486400" cy="3086100"/>
-          </a:xfrm>
-          <a:prstGeom prst="rect">
-            <a:avLst/>
-          </a:prstGeom>
-          <a:noFill/>
-          <a:ln w="12700">
-            <a:solidFill>
-              <a:prstClr val="black"/>
-            </a:solidFill>
-          </a:ln>
-        </p:spPr>
-        <p:txBody>
-          <a:bodyPr vert="horz" lIns="91440" tIns="45720" rIns="91440" bIns="45720" rtlCol="0" anchor="ctr"/>
-          <a:lstStyle/>
-          <a:p>
-            <a:endParaRPr lang="en-US"/>
-          </a:p>
-        </p:txBody>
-      </p:sp>
-      <p:sp>
-        <p:nvSpPr>
-          <p:cNvPr id="5" name="Notes Placeholder 4"/>
-          <p:cNvSpPr>
-            <a:spLocks noGrp="1"/>
-          </p:cNvSpPr>
-          <p:nvPr>
-            <p:ph type="body" sz="quarter" idx="3"/>
-          </p:nvPr>
-        </p:nvSpPr>
-        <p:spPr>
-          <a:xfrm>
-            <a:off x="685800" y="4400550"/>
-            <a:ext cx="5486400" cy="3600450"/>
-          </a:xfrm>
-          <a:prstGeom prst="rect">
-            <a:avLst/>
-          </a:prstGeom>
-        </p:spPr>
-        <p:txBody>
-          <a:bodyPr vert="horz" lIns="91440" tIns="45720" rIns="91440" bIns="45720" rtlCol="0"/>
-          <a:lstStyle/>
-          <a:p>
-            <a:pPr lvl="0"/>
-            <a:r>
-              <a:rPr lang="en-US"/>
-              <a:t>Click to edit Master text styles</a:t>
-            </a:r>
-          </a:p>
-          <a:p>
-            <a:pPr lvl="1"/>
-            <a:r>
-              <a:rPr lang="en-US"/>
-              <a:t>Second level</a:t>
-            </a:r>
-          </a:p>
-          <a:p>
-            <a:pPr lvl="2"/>
-            <a:r>
-              <a:rPr lang="en-US"/>
-              <a:t>Third level</a:t>
-            </a:r>
-          </a:p>
-          <a:p>
-            <a:pPr lvl="3"/>
-            <a:r>
-              <a:rPr lang="en-US"/>
-              <a:t>Fourth level</a:t>
-            </a:r>
-          </a:p>
-          <a:p>
-            <a:pPr lvl="4"/>
-            <a:r>
-              <a:rPr lang="en-US"/>
-              <a:t>Fifth level</a:t>
-            </a:r>
-          </a:p>
-        </p:txBody>
-      </p:sp>
-      <p:sp>
-        <p:nvSpPr>
-          <p:cNvPr id="6" name="Footer Placeholder 5"/>
-          <p:cNvSpPr>
-            <a:spLocks noGrp="1"/>
-          </p:cNvSpPr>
-          <p:nvPr>
-            <p:ph type="ftr" sz="quarter" idx="4"/>
-          </p:nvPr>
-        </p:nvSpPr>
-        <p:spPr>
-          <a:xfrm>
-            <a:off x="0" y="8685213"/>
-            <a:ext cx="2971800" cy="458787"/>
-          </a:xfrm>
-          <a:prstGeom prst="rect">
-            <a:avLst/>
-          </a:prstGeom>
-        </p:spPr>
-        <p:txBody>
-          <a:bodyPr vert="horz" lIns="91440" tIns="45720" rIns="91440" bIns="45720" rtlCol="0" anchor="b"/>
-          <a:lstStyle>
-            <a:lvl1pPr algn="l">
-              <a:defRPr sz="1200"/>
-            </a:lvl1pPr>
-          </a:lstStyle>
-          <a:p>
-            <a:endParaRPr lang="en-US"/>
-          </a:p>
-        </p:txBody>
-      </p:sp>
-      <p:sp>
-        <p:nvSpPr>
-          <p:cNvPr id="7" name="Slide Number Placeholder 6"/>
-          <p:cNvSpPr>
-            <a:spLocks noGrp="1"/>
-          </p:cNvSpPr>
-          <p:nvPr>
-            <p:ph type="sldNum" sz="quarter" idx="5"/>
-          </p:nvPr>
-        </p:nvSpPr>
-        <p:spPr>
-          <a:xfrm>
-            <a:off x="3884613" y="8685213"/>
-            <a:ext cx="2971800" cy="458787"/>
-          </a:xfrm>
-          <a:prstGeom prst="rect">
-            <a:avLst/>
-          </a:prstGeom>
-        </p:spPr>
-        <p:txBody>
-          <a:bodyPr vert="horz" lIns="91440" tIns="45720" rIns="91440" bIns="45720" rtlCol="0" anchor="b"/>
-          <a:lstStyle>
-            <a:lvl1pPr algn="r">
-              <a:defRPr sz="1200"/>
-            </a:lvl1pPr>
-          </a:lstStyle>
-          <a:p>
-            <a:fld id="{CE5E9CC1-C706-0F49-92D6-E571CC5EEA8F}" type="slidenum">
-              <a:rPr lang="en-US"/>
-              <a:t>‹#›</a:t>
-            </a:fld>
-            <a:endParaRPr lang="en-US"/>
-          </a:p>
-        </p:txBody>
-      </p:sp>
     </p:spTree>
     <p:extLst>
       <p:ext uri="{BB962C8B-B14F-4D97-AF65-F5344CB8AC3E}">
-        <p14:creationId xmlns:p14="http://schemas.microsoft.com/office/powerpoint/2010/main" val="1024086991"/>
+        <p14:creationId xmlns:p14="http://schemas.microsoft.com/office/powerpoint/2010/main" val="751497272"/>
       </p:ext>
     </p:extLst>
   </p:cSld>
@@ -500,10 +281,6 @@
           <a:bodyPr/>
           <a:lstStyle/>
           <a:p>
-            <a:r>
-              <a:rPr lang="en-US" dirty="0"/>
-              <a:t/>
-            </a:r>
             <a:endParaRPr lang="en-US" dirty="0"/>
           </a:p>
         </p:txBody>
@@ -577,6 +354,11 @@
 <file path=ppt/slideMasters/slideMaster1.xml><?xml version="1.0" encoding="utf-8"?>
 <p:sldMaster xmlns:a="http://schemas.openxmlformats.org/drawingml/2006/main" xmlns:r="http://schemas.openxmlformats.org/officeDocument/2006/relationships" xmlns:p="http://schemas.openxmlformats.org/presentationml/2006/main">
   <p:cSld>
+    <p:bg>
+      <p:bgRef idx="1001">
+        <a:schemeClr val="bg1"/>
+      </p:bgRef>
+    </p:bg>
     <p:spTree>
       <p:nvGrpSpPr>
         <p:cNvPr id="1" name=""/>
@@ -859,6 +641,7 @@
         <a:solidFill>
           <a:srgbClr val="0B1726"/>
         </a:solidFill>
+        <a:effectLst/>
       </p:bgPr>
     </p:bg>
     <p:spTree>
@@ -894,6 +677,13 @@
           </a:solidFill>
           <a:ln/>
         </p:spPr>
+        <p:txBody>
+          <a:bodyPr/>
+          <a:lstStyle/>
+          <a:p>
+            <a:endParaRPr lang="en-ZA"/>
+          </a:p>
+        </p:txBody>
       </p:sp>
       <p:sp>
         <p:nvSpPr>
@@ -914,6 +704,13 @@
           </a:solidFill>
           <a:ln/>
         </p:spPr>
+        <p:txBody>
+          <a:bodyPr/>
+          <a:lstStyle/>
+          <a:p>
+            <a:endParaRPr lang="en-ZA"/>
+          </a:p>
+        </p:txBody>
       </p:sp>
       <p:sp>
         <p:nvSpPr>
@@ -936,7 +733,7 @@
           <a:bodyPr wrap="square" lIns="0" tIns="0" rIns="0" bIns="0" rtlCol="0" anchor="t"/>
           <a:lstStyle/>
           <a:p>
-            <a:pPr indent="0" marL="0">
+            <a:pPr marL="0" indent="0">
               <a:buNone/>
             </a:pPr>
             <a:r>
@@ -950,9 +747,6 @@
               </a:rPr>
               <a:t>V</a:t>
             </a:r>
-            <a:pPr indent="0" marL="0">
-              <a:buNone/>
-            </a:pPr>
             <a:r>
               <a:rPr lang="en-US" sz="6000" b="1" dirty="0">
                 <a:solidFill>
@@ -989,11 +783,11 @@
           <a:bodyPr wrap="square" lIns="0" tIns="0" rIns="0" bIns="0" rtlCol="0" anchor="ctr"/>
           <a:lstStyle/>
           <a:p>
-            <a:pPr indent="0" marL="0">
-              <a:buNone/>
-            </a:pPr>
-            <a:r>
-              <a:rPr lang="en-US" sz="800" spc="300" kern="0" dirty="0">
+            <a:pPr marL="0" indent="0">
+              <a:buNone/>
+            </a:pPr>
+            <a:r>
+              <a:rPr lang="en-US" sz="800" kern="0" spc="300" dirty="0">
                 <a:solidFill>
                   <a:srgbClr val="8FA0B5"/>
                 </a:solidFill>
@@ -1028,11 +822,11 @@
           <a:bodyPr wrap="square" lIns="0" tIns="0" rIns="0" bIns="0" rtlCol="0" anchor="t"/>
           <a:lstStyle/>
           <a:p>
-            <a:pPr algn="r" indent="0" marL="0">
-              <a:buNone/>
-            </a:pPr>
-            <a:r>
-              <a:rPr lang="en-US" sz="900" b="1" spc="300" kern="0" dirty="0">
+            <a:pPr marL="0" indent="0" algn="r">
+              <a:buNone/>
+            </a:pPr>
+            <a:r>
+              <a:rPr lang="en-US" sz="900" b="1" kern="0" spc="300" dirty="0">
                 <a:solidFill>
                   <a:srgbClr val="00C2A8"/>
                 </a:solidFill>
@@ -1045,11 +839,11 @@
             <a:endParaRPr lang="en-US" sz="900" dirty="0"/>
           </a:p>
           <a:p>
-            <a:pPr algn="r" indent="0" marL="0">
-              <a:buNone/>
-            </a:pPr>
-            <a:r>
-              <a:rPr lang="en-US" sz="700" spc="100" kern="0" dirty="0">
+            <a:pPr marL="0" indent="0" algn="r">
+              <a:buNone/>
+            </a:pPr>
+            <a:r>
+              <a:rPr lang="en-US" sz="700" kern="0" spc="100" dirty="0">
                 <a:solidFill>
                   <a:srgbClr val="8FA0B5"/>
                 </a:solidFill>
@@ -1062,11 +856,11 @@
             <a:endParaRPr lang="en-US" sz="900" dirty="0"/>
           </a:p>
           <a:p>
-            <a:pPr algn="r" indent="0" marL="0">
-              <a:buNone/>
-            </a:pPr>
-            <a:r>
-              <a:rPr lang="en-US" sz="700" spc="100" kern="0" dirty="0">
+            <a:pPr marL="0" indent="0" algn="r">
+              <a:buNone/>
+            </a:pPr>
+            <a:r>
+              <a:rPr lang="en-US" sz="700" kern="0" spc="100" dirty="0">
                 <a:solidFill>
                   <a:srgbClr val="8FA0B5"/>
                 </a:solidFill>
@@ -1101,7 +895,7 @@
           <a:bodyPr wrap="square" lIns="0" tIns="0" rIns="0" bIns="0" rtlCol="0" anchor="ctr"/>
           <a:lstStyle/>
           <a:p>
-            <a:pPr indent="0" marL="0">
+            <a:pPr marL="0" indent="0">
               <a:buNone/>
             </a:pPr>
             <a:r>
@@ -1115,9 +909,6 @@
               </a:rPr>
               <a:t>A SIMD-lite extension of StarCore-1</a:t>
             </a:r>
-            <a:pPr indent="0" marL="0">
-              <a:buNone/>
-            </a:pPr>
             <a:r>
               <a:rPr lang="en-US" sz="1100" dirty="0">
                 <a:solidFill>
@@ -1154,7 +945,7 @@
           <a:bodyPr wrap="square" lIns="0" tIns="0" rIns="0" bIns="0" rtlCol="0" anchor="ctr"/>
           <a:lstStyle/>
           <a:p>
-            <a:pPr indent="0" marL="0">
+            <a:pPr marL="0" indent="0">
               <a:buNone/>
             </a:pPr>
             <a:r>
@@ -1193,7 +984,7 @@
           <a:bodyPr wrap="square" lIns="0" tIns="0" rIns="0" bIns="0" rtlCol="0" anchor="ctr"/>
           <a:lstStyle/>
           <a:p>
-            <a:pPr indent="0" marL="0">
+            <a:pPr marL="0" indent="0">
               <a:spcAft>
                 <a:spcPts val="200"/>
               </a:spcAft>
@@ -1210,12 +1001,6 @@
               </a:rPr>
               <a:t>Satellites generate floods of byte-packed sensor data — temperature channels, voltage rails, GPIO status. The baseline StarCore-1 forces you to </a:t>
             </a:r>
-            <a:pPr indent="0" marL="0">
-              <a:spcAft>
-                <a:spcPts val="200"/>
-              </a:spcAft>
-              <a:buNone/>
-            </a:pPr>
             <a:r>
               <a:rPr lang="en-US" sz="900" b="1" dirty="0">
                 <a:solidFill>
@@ -1227,12 +1012,6 @@
               </a:rPr>
               <a:t>unpack, compute, repack </a:t>
             </a:r>
-            <a:pPr indent="0" marL="0">
-              <a:spcAft>
-                <a:spcPts val="200"/>
-              </a:spcAft>
-              <a:buNone/>
-            </a:pPr>
             <a:r>
               <a:rPr lang="en-US" sz="900" dirty="0">
                 <a:solidFill>
@@ -1244,12 +1023,6 @@
               </a:rPr>
               <a:t>every word. </a:t>
             </a:r>
-            <a:pPr indent="0" marL="0">
-              <a:spcAft>
-                <a:spcPts val="200"/>
-              </a:spcAft>
-              <a:buNone/>
-            </a:pPr>
             <a:r>
               <a:rPr lang="en-US" sz="900" b="1" dirty="0">
                 <a:solidFill>
@@ -1261,12 +1034,6 @@
               </a:rPr>
               <a:t>VSS does both bytes at once</a:t>
             </a:r>
-            <a:pPr indent="0" marL="0">
-              <a:spcAft>
-                <a:spcPts val="200"/>
-              </a:spcAft>
-              <a:buNone/>
-            </a:pPr>
             <a:r>
               <a:rPr lang="en-US" sz="900" dirty="0">
                 <a:solidFill>
@@ -1303,11 +1070,11 @@
           <a:bodyPr wrap="square" lIns="0" tIns="0" rIns="0" bIns="0" rtlCol="0" anchor="ctr"/>
           <a:lstStyle/>
           <a:p>
-            <a:pPr indent="0" marL="0">
-              <a:buNone/>
-            </a:pPr>
-            <a:r>
-              <a:rPr lang="en-US" sz="800" b="1" spc="300" kern="0" dirty="0">
+            <a:pPr marL="0" indent="0">
+              <a:buNone/>
+            </a:pPr>
+            <a:r>
+              <a:rPr lang="en-US" sz="800" b="1" kern="0" spc="300" dirty="0">
                 <a:solidFill>
                   <a:srgbClr val="00C2A8"/>
                 </a:solidFill>
@@ -1340,6 +1107,13 @@
           </a:solidFill>
           <a:ln/>
         </p:spPr>
+        <p:txBody>
+          <a:bodyPr/>
+          <a:lstStyle/>
+          <a:p>
+            <a:endParaRPr lang="en-ZA"/>
+          </a:p>
+        </p:txBody>
       </p:sp>
       <p:sp>
         <p:nvSpPr>
@@ -1360,6 +1134,13 @@
           </a:solidFill>
           <a:ln/>
         </p:spPr>
+        <p:txBody>
+          <a:bodyPr/>
+          <a:lstStyle/>
+          <a:p>
+            <a:endParaRPr lang="en-ZA"/>
+          </a:p>
+        </p:txBody>
       </p:sp>
       <p:sp>
         <p:nvSpPr>
@@ -1382,7 +1163,7 @@
           <a:bodyPr wrap="square" lIns="0" tIns="0" rIns="0" bIns="0" rtlCol="0" anchor="ctr"/>
           <a:lstStyle/>
           <a:p>
-            <a:pPr indent="0" marL="0">
+            <a:pPr marL="0" indent="0">
               <a:buNone/>
             </a:pPr>
             <a:r>
@@ -1421,7 +1202,7 @@
           <a:bodyPr wrap="square" lIns="0" tIns="0" rIns="0" bIns="0" rtlCol="0" anchor="ctr"/>
           <a:lstStyle/>
           <a:p>
-            <a:pPr indent="0" marL="0">
+            <a:pPr marL="0" indent="0">
               <a:buNone/>
             </a:pPr>
             <a:r>
@@ -1460,7 +1241,7 @@
           <a:bodyPr wrap="square" lIns="0" tIns="0" rIns="0" bIns="0" rtlCol="0" anchor="ctr"/>
           <a:lstStyle/>
           <a:p>
-            <a:pPr indent="0" marL="0">
+            <a:pPr marL="0" indent="0">
               <a:buNone/>
             </a:pPr>
             <a:r>
@@ -1497,6 +1278,13 @@
           </a:solidFill>
           <a:ln/>
         </p:spPr>
+        <p:txBody>
+          <a:bodyPr/>
+          <a:lstStyle/>
+          <a:p>
+            <a:endParaRPr lang="en-ZA"/>
+          </a:p>
+        </p:txBody>
       </p:sp>
       <p:sp>
         <p:nvSpPr>
@@ -1517,6 +1305,13 @@
           </a:solidFill>
           <a:ln/>
         </p:spPr>
+        <p:txBody>
+          <a:bodyPr/>
+          <a:lstStyle/>
+          <a:p>
+            <a:endParaRPr lang="en-ZA"/>
+          </a:p>
+        </p:txBody>
       </p:sp>
       <p:sp>
         <p:nvSpPr>
@@ -1539,7 +1334,7 @@
           <a:bodyPr wrap="square" lIns="0" tIns="0" rIns="0" bIns="0" rtlCol="0" anchor="ctr"/>
           <a:lstStyle/>
           <a:p>
-            <a:pPr indent="0" marL="0">
+            <a:pPr marL="0" indent="0">
               <a:buNone/>
             </a:pPr>
             <a:r>
@@ -1578,7 +1373,7 @@
           <a:bodyPr wrap="square" lIns="0" tIns="0" rIns="0" bIns="0" rtlCol="0" anchor="ctr"/>
           <a:lstStyle/>
           <a:p>
-            <a:pPr indent="0" marL="0">
+            <a:pPr marL="0" indent="0">
               <a:buNone/>
             </a:pPr>
             <a:r>
@@ -1617,7 +1412,7 @@
           <a:bodyPr wrap="square" lIns="0" tIns="0" rIns="0" bIns="0" rtlCol="0" anchor="ctr"/>
           <a:lstStyle/>
           <a:p>
-            <a:pPr indent="0" marL="0">
+            <a:pPr marL="0" indent="0">
               <a:buNone/>
             </a:pPr>
             <a:r>
@@ -1654,6 +1449,13 @@
           </a:solidFill>
           <a:ln/>
         </p:spPr>
+        <p:txBody>
+          <a:bodyPr/>
+          <a:lstStyle/>
+          <a:p>
+            <a:endParaRPr lang="en-ZA"/>
+          </a:p>
+        </p:txBody>
       </p:sp>
       <p:sp>
         <p:nvSpPr>
@@ -1674,6 +1476,13 @@
           </a:solidFill>
           <a:ln/>
         </p:spPr>
+        <p:txBody>
+          <a:bodyPr/>
+          <a:lstStyle/>
+          <a:p>
+            <a:endParaRPr lang="en-ZA"/>
+          </a:p>
+        </p:txBody>
       </p:sp>
       <p:sp>
         <p:nvSpPr>
@@ -1696,7 +1505,7 @@
           <a:bodyPr wrap="square" lIns="0" tIns="0" rIns="0" bIns="0" rtlCol="0" anchor="ctr"/>
           <a:lstStyle/>
           <a:p>
-            <a:pPr indent="0" marL="0">
+            <a:pPr marL="0" indent="0">
               <a:buNone/>
             </a:pPr>
             <a:r>
@@ -1735,7 +1544,7 @@
           <a:bodyPr wrap="square" lIns="0" tIns="0" rIns="0" bIns="0" rtlCol="0" anchor="ctr"/>
           <a:lstStyle/>
           <a:p>
-            <a:pPr indent="0" marL="0">
+            <a:pPr marL="0" indent="0">
               <a:buNone/>
             </a:pPr>
             <a:r>
@@ -1774,7 +1583,7 @@
           <a:bodyPr wrap="square" lIns="0" tIns="0" rIns="0" bIns="0" rtlCol="0" anchor="ctr"/>
           <a:lstStyle/>
           <a:p>
-            <a:pPr indent="0" marL="0">
+            <a:pPr marL="0" indent="0">
               <a:buNone/>
             </a:pPr>
             <a:r>
@@ -1811,6 +1620,13 @@
           </a:solidFill>
           <a:ln/>
         </p:spPr>
+        <p:txBody>
+          <a:bodyPr/>
+          <a:lstStyle/>
+          <a:p>
+            <a:endParaRPr lang="en-ZA"/>
+          </a:p>
+        </p:txBody>
       </p:sp>
       <p:sp>
         <p:nvSpPr>
@@ -1831,6 +1647,13 @@
           </a:solidFill>
           <a:ln/>
         </p:spPr>
+        <p:txBody>
+          <a:bodyPr/>
+          <a:lstStyle/>
+          <a:p>
+            <a:endParaRPr lang="en-ZA"/>
+          </a:p>
+        </p:txBody>
       </p:sp>
       <p:sp>
         <p:nvSpPr>
@@ -1853,7 +1676,7 @@
           <a:bodyPr wrap="square" lIns="0" tIns="0" rIns="0" bIns="0" rtlCol="0" anchor="ctr"/>
           <a:lstStyle/>
           <a:p>
-            <a:pPr indent="0" marL="0">
+            <a:pPr marL="0" indent="0">
               <a:buNone/>
             </a:pPr>
             <a:r>
@@ -1892,7 +1715,7 @@
           <a:bodyPr wrap="square" lIns="0" tIns="0" rIns="0" bIns="0" rtlCol="0" anchor="ctr"/>
           <a:lstStyle/>
           <a:p>
-            <a:pPr indent="0" marL="0">
+            <a:pPr marL="0" indent="0">
               <a:buNone/>
             </a:pPr>
             <a:r>
@@ -1931,7 +1754,7 @@
           <a:bodyPr wrap="square" lIns="0" tIns="0" rIns="0" bIns="0" rtlCol="0" anchor="ctr"/>
           <a:lstStyle/>
           <a:p>
-            <a:pPr indent="0" marL="0">
+            <a:pPr marL="0" indent="0">
               <a:buNone/>
             </a:pPr>
             <a:r>
@@ -1968,6 +1791,13 @@
           </a:solidFill>
           <a:ln/>
         </p:spPr>
+        <p:txBody>
+          <a:bodyPr/>
+          <a:lstStyle/>
+          <a:p>
+            <a:endParaRPr lang="en-ZA"/>
+          </a:p>
+        </p:txBody>
       </p:sp>
       <p:sp>
         <p:nvSpPr>
@@ -1988,6 +1818,13 @@
           </a:solidFill>
           <a:ln/>
         </p:spPr>
+        <p:txBody>
+          <a:bodyPr/>
+          <a:lstStyle/>
+          <a:p>
+            <a:endParaRPr lang="en-ZA"/>
+          </a:p>
+        </p:txBody>
       </p:sp>
       <p:sp>
         <p:nvSpPr>
@@ -2010,7 +1847,7 @@
           <a:bodyPr wrap="square" lIns="0" tIns="0" rIns="0" bIns="0" rtlCol="0" anchor="ctr"/>
           <a:lstStyle/>
           <a:p>
-            <a:pPr algn="ctr" indent="0" marL="0">
+            <a:pPr marL="0" indent="0" algn="ctr">
               <a:buNone/>
             </a:pPr>
             <a:r>
@@ -2049,11 +1886,11 @@
           <a:bodyPr wrap="square" lIns="0" tIns="0" rIns="0" bIns="0" rtlCol="0" anchor="ctr"/>
           <a:lstStyle/>
           <a:p>
-            <a:pPr algn="ctr" indent="0" marL="0">
-              <a:buNone/>
-            </a:pPr>
-            <a:r>
-              <a:rPr lang="en-US" sz="700" spc="150" kern="0" dirty="0">
+            <a:pPr marL="0" indent="0" algn="ctr">
+              <a:buNone/>
+            </a:pPr>
+            <a:r>
+              <a:rPr lang="en-US" sz="700" kern="0" spc="150" dirty="0">
                 <a:solidFill>
                   <a:srgbClr val="8FA0B5"/>
                 </a:solidFill>
@@ -2061,7 +1898,7 @@
                 <a:ea typeface="Calibri" pitchFamily="34" charset="-122"/>
                 <a:cs typeface="Calibri" pitchFamily="34" charset="-120"/>
               </a:rPr>
-              <a:t>BYTES / INSTR</a:t>
+              <a:t>DATA BYTES / INSTR</a:t>
             </a:r>
             <a:endParaRPr lang="en-US" sz="700" dirty="0"/>
           </a:p>
@@ -2075,7 +1912,7 @@
         </p:nvSpPr>
         <p:spPr>
           <a:xfrm>
-            <a:off x="1874520" y="5212080"/>
+            <a:off x="3027045" y="5230368"/>
             <a:ext cx="1591056" cy="329184"/>
           </a:xfrm>
           <a:prstGeom prst="rect">
@@ -2088,7 +1925,7 @@
           <a:bodyPr wrap="square" lIns="0" tIns="0" rIns="0" bIns="0" rtlCol="0" anchor="ctr"/>
           <a:lstStyle/>
           <a:p>
-            <a:pPr algn="ctr" indent="0" marL="0">
+            <a:pPr marL="0" indent="0" algn="ctr">
               <a:buNone/>
             </a:pPr>
             <a:r>
@@ -2100,7 +1937,7 @@
                 <a:ea typeface="Calibri" pitchFamily="34" charset="-122"/>
                 <a:cs typeface="Calibri" pitchFamily="34" charset="-120"/>
               </a:rPr>
-              <a:t>6x</a:t>
+              <a:t>7x</a:t>
             </a:r>
             <a:endParaRPr lang="en-US" sz="2200" dirty="0"/>
           </a:p>
@@ -2114,7 +1951,7 @@
         </p:nvSpPr>
         <p:spPr>
           <a:xfrm>
-            <a:off x="1874520" y="5532120"/>
+            <a:off x="3090672" y="5541264"/>
             <a:ext cx="1591056" cy="128016"/>
           </a:xfrm>
           <a:prstGeom prst="rect">
@@ -2127,11 +1964,11 @@
           <a:bodyPr wrap="square" lIns="0" tIns="0" rIns="0" bIns="0" rtlCol="0" anchor="ctr"/>
           <a:lstStyle/>
           <a:p>
-            <a:pPr algn="ctr" indent="0" marL="0">
-              <a:buNone/>
-            </a:pPr>
-            <a:r>
-              <a:rPr lang="en-US" sz="700" spc="150" kern="0" dirty="0">
+            <a:pPr marL="0" indent="0" algn="ctr">
+              <a:buNone/>
+            </a:pPr>
+            <a:r>
+              <a:rPr lang="en-US" sz="700" kern="0" spc="150" dirty="0">
                 <a:solidFill>
                   <a:srgbClr val="8FA0B5"/>
                 </a:solidFill>
@@ -2140,84 +1977,6 @@
                 <a:cs typeface="Calibri" pitchFamily="34" charset="-120"/>
               </a:rPr>
               <a:t>MODELLED SPEEDUP*</a:t>
-            </a:r>
-            <a:endParaRPr lang="en-US" sz="700" dirty="0"/>
-          </a:p>
-        </p:txBody>
-      </p:sp>
-      <p:sp>
-        <p:nvSpPr>
-          <p:cNvPr id="37" name="Text 35"/>
-          <p:cNvSpPr/>
-          <p:nvPr/>
-        </p:nvSpPr>
-        <p:spPr>
-          <a:xfrm>
-            <a:off x="3465576" y="5212080"/>
-            <a:ext cx="1591056" cy="329184"/>
-          </a:xfrm>
-          <a:prstGeom prst="rect">
-            <a:avLst/>
-          </a:prstGeom>
-          <a:noFill/>
-          <a:ln/>
-        </p:spPr>
-        <p:txBody>
-          <a:bodyPr wrap="square" lIns="0" tIns="0" rIns="0" bIns="0" rtlCol="0" anchor="ctr"/>
-          <a:lstStyle/>
-          <a:p>
-            <a:pPr algn="ctr" indent="0" marL="0">
-              <a:buNone/>
-            </a:pPr>
-            <a:r>
-              <a:rPr lang="en-US" sz="2200" b="1" dirty="0">
-                <a:solidFill>
-                  <a:srgbClr val="F2A93B"/>
-                </a:solidFill>
-                <a:latin typeface="Calibri" pitchFamily="34" charset="0"/>
-                <a:ea typeface="Calibri" pitchFamily="34" charset="-122"/>
-                <a:cs typeface="Calibri" pitchFamily="34" charset="-120"/>
-              </a:rPr>
-              <a:t>39/39</a:t>
-            </a:r>
-            <a:endParaRPr lang="en-US" sz="2200" dirty="0"/>
-          </a:p>
-        </p:txBody>
-      </p:sp>
-      <p:sp>
-        <p:nvSpPr>
-          <p:cNvPr id="38" name="Text 36"/>
-          <p:cNvSpPr/>
-          <p:nvPr/>
-        </p:nvSpPr>
-        <p:spPr>
-          <a:xfrm>
-            <a:off x="3465576" y="5532120"/>
-            <a:ext cx="1591056" cy="128016"/>
-          </a:xfrm>
-          <a:prstGeom prst="rect">
-            <a:avLst/>
-          </a:prstGeom>
-          <a:noFill/>
-          <a:ln/>
-        </p:spPr>
-        <p:txBody>
-          <a:bodyPr wrap="square" lIns="0" tIns="0" rIns="0" bIns="0" rtlCol="0" anchor="ctr"/>
-          <a:lstStyle/>
-          <a:p>
-            <a:pPr algn="ctr" indent="0" marL="0">
-              <a:buNone/>
-            </a:pPr>
-            <a:r>
-              <a:rPr lang="en-US" sz="700" spc="150" kern="0" dirty="0">
-                <a:solidFill>
-                  <a:srgbClr val="8FA0B5"/>
-                </a:solidFill>
-                <a:latin typeface="Calibri" pitchFamily="34" charset="0"/>
-                <a:ea typeface="Calibri" pitchFamily="34" charset="-122"/>
-                <a:cs typeface="Calibri" pitchFamily="34" charset="-120"/>
-              </a:rPr>
-              <a:t>GOLDEN TESTS PASS</a:t>
             </a:r>
             <a:endParaRPr lang="en-US" sz="700" dirty="0"/>
           </a:p>
@@ -2244,11 +2003,11 @@
           <a:bodyPr wrap="square" lIns="0" tIns="0" rIns="0" bIns="0" rtlCol="0" anchor="ctr"/>
           <a:lstStyle/>
           <a:p>
-            <a:pPr indent="0" marL="0">
-              <a:buNone/>
-            </a:pPr>
-            <a:r>
-              <a:rPr lang="en-US" sz="800" b="1" spc="300" kern="0" dirty="0">
+            <a:pPr marL="0" indent="0">
+              <a:buNone/>
+            </a:pPr>
+            <a:r>
+              <a:rPr lang="en-US" sz="800" b="1" kern="0" spc="300" dirty="0">
                 <a:solidFill>
                   <a:srgbClr val="00C2A8"/>
                 </a:solidFill>
@@ -2283,11 +2042,11 @@
           <a:bodyPr wrap="square" lIns="0" tIns="0" rIns="0" bIns="0" rtlCol="0" anchor="ctr"/>
           <a:lstStyle/>
           <a:p>
-            <a:pPr indent="0" marL="0">
-              <a:buNone/>
-            </a:pPr>
-            <a:r>
-              <a:rPr lang="en-US" sz="650" spc="50" kern="0" dirty="0">
+            <a:pPr marL="0" indent="0">
+              <a:buNone/>
+            </a:pPr>
+            <a:r>
+              <a:rPr lang="en-US" sz="650" kern="0" spc="50" dirty="0">
                 <a:solidFill>
                   <a:srgbClr val="8FA0B5"/>
                 </a:solidFill>
@@ -2322,7 +2081,7 @@
           <a:bodyPr wrap="square" lIns="0" tIns="0" rIns="0" bIns="0" rtlCol="0" anchor="ctr"/>
           <a:lstStyle/>
           <a:p>
-            <a:pPr indent="0" marL="0">
+            <a:pPr marL="0" indent="0">
               <a:buNone/>
             </a:pPr>
             <a:r>
@@ -2361,11 +2120,11 @@
           <a:bodyPr wrap="square" lIns="0" tIns="0" rIns="0" bIns="0" rtlCol="0" anchor="ctr"/>
           <a:lstStyle/>
           <a:p>
-            <a:pPr indent="0" marL="0">
-              <a:buNone/>
-            </a:pPr>
-            <a:r>
-              <a:rPr lang="en-US" sz="650" spc="50" kern="0" dirty="0">
+            <a:pPr marL="0" indent="0">
+              <a:buNone/>
+            </a:pPr>
+            <a:r>
+              <a:rPr lang="en-US" sz="650" kern="0" spc="50" dirty="0">
                 <a:solidFill>
                   <a:srgbClr val="8FA0B5"/>
                 </a:solidFill>
@@ -2400,7 +2159,7 @@
           <a:bodyPr wrap="square" lIns="0" tIns="0" rIns="0" bIns="0" rtlCol="0" anchor="ctr"/>
           <a:lstStyle/>
           <a:p>
-            <a:pPr indent="0" marL="0">
+            <a:pPr marL="0" indent="0">
               <a:buNone/>
             </a:pPr>
             <a:r>
@@ -2439,11 +2198,11 @@
           <a:bodyPr wrap="square" lIns="0" tIns="0" rIns="0" bIns="0" rtlCol="0" anchor="ctr"/>
           <a:lstStyle/>
           <a:p>
-            <a:pPr indent="0" marL="0">
-              <a:buNone/>
-            </a:pPr>
-            <a:r>
-              <a:rPr lang="en-US" sz="650" spc="50" kern="0" dirty="0">
+            <a:pPr marL="0" indent="0">
+              <a:buNone/>
+            </a:pPr>
+            <a:r>
+              <a:rPr lang="en-US" sz="650" kern="0" spc="50" dirty="0">
                 <a:solidFill>
                   <a:srgbClr val="8FA0B5"/>
                 </a:solidFill>
@@ -2478,7 +2237,7 @@
           <a:bodyPr wrap="square" lIns="0" tIns="0" rIns="0" bIns="0" rtlCol="0" anchor="ctr"/>
           <a:lstStyle/>
           <a:p>
-            <a:pPr indent="0" marL="0">
+            <a:pPr marL="0" indent="0">
               <a:buNone/>
             </a:pPr>
             <a:r>
@@ -2517,11 +2276,11 @@
           <a:bodyPr wrap="square" lIns="0" tIns="0" rIns="0" bIns="0" rtlCol="0" anchor="ctr"/>
           <a:lstStyle/>
           <a:p>
-            <a:pPr indent="0" marL="0">
-              <a:buNone/>
-            </a:pPr>
-            <a:r>
-              <a:rPr lang="en-US" sz="650" spc="50" kern="0" dirty="0">
+            <a:pPr marL="0" indent="0">
+              <a:buNone/>
+            </a:pPr>
+            <a:r>
+              <a:rPr lang="en-US" sz="650" kern="0" spc="50" dirty="0">
                 <a:solidFill>
                   <a:srgbClr val="8FA0B5"/>
                 </a:solidFill>
@@ -2556,7 +2315,7 @@
           <a:bodyPr wrap="square" lIns="0" tIns="0" rIns="0" bIns="0" rtlCol="0" anchor="ctr"/>
           <a:lstStyle/>
           <a:p>
-            <a:pPr indent="0" marL="0">
+            <a:pPr marL="0" indent="0">
               <a:buNone/>
             </a:pPr>
             <a:r>
@@ -2595,11 +2354,11 @@
           <a:bodyPr wrap="square" lIns="0" tIns="0" rIns="0" bIns="0" rtlCol="0" anchor="ctr"/>
           <a:lstStyle/>
           <a:p>
-            <a:pPr indent="0" marL="0">
-              <a:buNone/>
-            </a:pPr>
-            <a:r>
-              <a:rPr lang="en-US" sz="650" spc="50" kern="0" dirty="0">
+            <a:pPr marL="0" indent="0">
+              <a:buNone/>
+            </a:pPr>
+            <a:r>
+              <a:rPr lang="en-US" sz="650" kern="0" spc="50" dirty="0">
                 <a:solidFill>
                   <a:srgbClr val="8FA0B5"/>
                 </a:solidFill>
@@ -2634,7 +2393,7 @@
           <a:bodyPr wrap="square" lIns="0" tIns="0" rIns="0" bIns="0" rtlCol="0" anchor="ctr"/>
           <a:lstStyle/>
           <a:p>
-            <a:pPr indent="0" marL="0">
+            <a:pPr marL="0" indent="0">
               <a:buNone/>
             </a:pPr>
             <a:r>
@@ -2673,11 +2432,11 @@
           <a:bodyPr wrap="square" lIns="0" tIns="0" rIns="0" bIns="0" rtlCol="0" anchor="ctr"/>
           <a:lstStyle/>
           <a:p>
-            <a:pPr indent="0" marL="0">
-              <a:buNone/>
-            </a:pPr>
-            <a:r>
-              <a:rPr lang="en-US" sz="650" spc="50" kern="0" dirty="0">
+            <a:pPr marL="0" indent="0">
+              <a:buNone/>
+            </a:pPr>
+            <a:r>
+              <a:rPr lang="en-US" sz="650" kern="0" spc="50" dirty="0">
                 <a:solidFill>
                   <a:srgbClr val="8FA0B5"/>
                 </a:solidFill>
@@ -2712,7 +2471,7 @@
           <a:bodyPr wrap="square" lIns="0" tIns="0" rIns="0" bIns="0" rtlCol="0" anchor="ctr"/>
           <a:lstStyle/>
           <a:p>
-            <a:pPr indent="0" marL="0">
+            <a:pPr marL="0" indent="0">
               <a:buNone/>
             </a:pPr>
             <a:r>
@@ -2749,6 +2508,13 @@
           </a:solidFill>
           <a:ln/>
         </p:spPr>
+        <p:txBody>
+          <a:bodyPr/>
+          <a:lstStyle/>
+          <a:p>
+            <a:endParaRPr lang="en-ZA"/>
+          </a:p>
+        </p:txBody>
       </p:sp>
       <p:sp>
         <p:nvSpPr>
@@ -2769,6 +2535,13 @@
           </a:solidFill>
           <a:ln/>
         </p:spPr>
+        <p:txBody>
+          <a:bodyPr/>
+          <a:lstStyle/>
+          <a:p>
+            <a:endParaRPr lang="en-ZA"/>
+          </a:p>
+        </p:txBody>
       </p:sp>
       <p:sp>
         <p:nvSpPr>
@@ -2778,20 +2551,20 @@
         </p:nvSpPr>
         <p:spPr>
           <a:xfrm>
-            <a:off x="292608" y="7178040"/>
-            <a:ext cx="3840480" cy="347472"/>
-          </a:xfrm>
-          <a:prstGeom prst="rect">
-            <a:avLst/>
-          </a:prstGeom>
-          <a:noFill/>
-          <a:ln/>
-        </p:spPr>
-        <p:txBody>
-          <a:bodyPr wrap="square" lIns="0" tIns="0" rIns="0" bIns="0" rtlCol="0" anchor="ctr"/>
-          <a:lstStyle/>
-          <a:p>
-            <a:pPr indent="0" marL="0">
+            <a:off x="32327" y="7173468"/>
+            <a:ext cx="4364182" cy="347472"/>
+          </a:xfrm>
+          <a:prstGeom prst="rect">
+            <a:avLst/>
+          </a:prstGeom>
+          <a:noFill/>
+          <a:ln/>
+        </p:spPr>
+        <p:txBody>
+          <a:bodyPr wrap="square" lIns="0" tIns="0" rIns="0" bIns="0" rtlCol="0" anchor="ctr"/>
+          <a:lstStyle/>
+          <a:p>
+            <a:pPr marL="0" indent="0">
               <a:buNone/>
             </a:pPr>
             <a:r>
@@ -2808,9 +2581,6 @@
             <a:endParaRPr lang="en-US" sz="800" dirty="0"/>
           </a:p>
           <a:p>
-            <a:pPr indent="0" marL="0">
-              <a:buNone/>
-            </a:pPr>
             <a:r>
               <a:rPr lang="en-US" sz="650" dirty="0">
                 <a:solidFill>
@@ -2820,9 +2590,31 @@
                 <a:ea typeface="Consolas" pitchFamily="34" charset="-122"/>
                 <a:cs typeface="Consolas" pitchFamily="34" charset="-120"/>
               </a:rPr>
-              <a:t>Joab Gray Kloppers (KLPJOA002) · Alex Hillman (HLLALE010)</a:t>
-            </a:r>
-            <a:endParaRPr lang="en-US" sz="800" dirty="0"/>
+              <a:t>Joab Gray Kloppers (KLPJOA002) · Alex Hillman (HLLALE010) </a:t>
+            </a:r>
+            <a:r>
+              <a:rPr lang="en-US" sz="800" dirty="0">
+                <a:solidFill>
+                  <a:srgbClr val="8FA0B5"/>
+                </a:solidFill>
+                <a:latin typeface="Consolas" pitchFamily="34" charset="0"/>
+                <a:ea typeface="Consolas" pitchFamily="34" charset="-122"/>
+                <a:cs typeface="Consolas" pitchFamily="34" charset="-120"/>
+              </a:rPr>
+              <a:t>· </a:t>
+            </a:r>
+            <a:r>
+              <a:rPr lang="en-US" sz="650" dirty="0">
+                <a:solidFill>
+                  <a:srgbClr val="8FA0B5"/>
+                </a:solidFill>
+                <a:latin typeface="Consolas" pitchFamily="34" charset="0"/>
+                <a:ea typeface="Consolas" pitchFamily="34" charset="-122"/>
+                <a:cs typeface="Consolas" pitchFamily="34" charset="-120"/>
+              </a:rPr>
+              <a:t>Justin Heathcote-Marks (HTHJUS001)</a:t>
+            </a:r>
+            <a:endParaRPr lang="en-US" sz="650" dirty="0"/>
           </a:p>
         </p:txBody>
       </p:sp>
@@ -2834,20 +2626,20 @@
         </p:nvSpPr>
         <p:spPr>
           <a:xfrm>
-            <a:off x="3931920" y="7178040"/>
-            <a:ext cx="1280160" cy="347472"/>
-          </a:xfrm>
-          <a:prstGeom prst="rect">
-            <a:avLst/>
-          </a:prstGeom>
-          <a:noFill/>
-          <a:ln/>
-        </p:spPr>
-        <p:txBody>
-          <a:bodyPr wrap="square" lIns="0" tIns="0" rIns="0" bIns="0" rtlCol="0" anchor="ctr"/>
-          <a:lstStyle/>
-          <a:p>
-            <a:pPr algn="r" indent="0" marL="0">
+            <a:off x="4352695" y="7178040"/>
+            <a:ext cx="949498" cy="347472"/>
+          </a:xfrm>
+          <a:prstGeom prst="rect">
+            <a:avLst/>
+          </a:prstGeom>
+          <a:noFill/>
+          <a:ln/>
+        </p:spPr>
+        <p:txBody>
+          <a:bodyPr wrap="square" lIns="0" tIns="0" rIns="0" bIns="0" rtlCol="0" anchor="ctr"/>
+          <a:lstStyle/>
+          <a:p>
+            <a:pPr marL="0" indent="0" algn="r">
               <a:buNone/>
             </a:pPr>
             <a:r>
@@ -2864,7 +2656,7 @@
             <a:endParaRPr lang="en-US" sz="650" dirty="0"/>
           </a:p>
           <a:p>
-            <a:pPr algn="r" indent="0" marL="0">
+            <a:pPr marL="0" indent="0" algn="r">
               <a:buNone/>
             </a:pPr>
             <a:r>
@@ -3183,4 +2975,319 @@
     </a:ext>
   </a:extLst>
 </a:theme>
+</file>
+
+<file path=ppt/theme/theme2.xml><?xml version="1.0" encoding="utf-8"?>
+<a:theme xmlns:a="http://schemas.openxmlformats.org/drawingml/2006/main" name="Office Theme">
+  <a:themeElements>
+    <a:clrScheme name="Office">
+      <a:dk1>
+        <a:sysClr val="windowText" lastClr="000000"/>
+      </a:dk1>
+      <a:lt1>
+        <a:sysClr val="window" lastClr="FFFFFF"/>
+      </a:lt1>
+      <a:dk2>
+        <a:srgbClr val="0E2841"/>
+      </a:dk2>
+      <a:lt2>
+        <a:srgbClr val="E8E8E8"/>
+      </a:lt2>
+      <a:accent1>
+        <a:srgbClr val="156082"/>
+      </a:accent1>
+      <a:accent2>
+        <a:srgbClr val="E97132"/>
+      </a:accent2>
+      <a:accent3>
+        <a:srgbClr val="196B24"/>
+      </a:accent3>
+      <a:accent4>
+        <a:srgbClr val="0F9ED5"/>
+      </a:accent4>
+      <a:accent5>
+        <a:srgbClr val="A02B93"/>
+      </a:accent5>
+      <a:accent6>
+        <a:srgbClr val="4EA72E"/>
+      </a:accent6>
+      <a:hlink>
+        <a:srgbClr val="467886"/>
+      </a:hlink>
+      <a:folHlink>
+        <a:srgbClr val="96607D"/>
+      </a:folHlink>
+    </a:clrScheme>
+    <a:fontScheme name="Office">
+      <a:majorFont>
+        <a:latin typeface="Aptos Display" panose="02110004020202020204"/>
+        <a:ea typeface=""/>
+        <a:cs typeface=""/>
+        <a:font script="Jpan" typeface="游ゴシック Light"/>
+        <a:font script="Hang" typeface="맑은 고딕"/>
+        <a:font script="Hans" typeface="等线 Light"/>
+        <a:font script="Hant" typeface="新細明體"/>
+        <a:font script="Arab" typeface="Times New Roman"/>
+        <a:font script="Hebr" typeface="Times New Roman"/>
+        <a:font script="Thai" typeface="Angsana New"/>
+        <a:font script="Ethi" typeface="Nyala"/>
+        <a:font script="Beng" typeface="Vrinda"/>
+        <a:font script="Gujr" typeface="Shruti"/>
+        <a:font script="Khmr" typeface="MoolBoran"/>
+        <a:font script="Knda" typeface="Tunga"/>
+        <a:font script="Guru" typeface="Raavi"/>
+        <a:font script="Cans" typeface="Euphemia"/>
+        <a:font script="Cher" typeface="Plantagenet Cherokee"/>
+        <a:font script="Yiii" typeface="Microsoft Yi Baiti"/>
+        <a:font script="Tibt" typeface="Microsoft Himalaya"/>
+        <a:font script="Thaa" typeface="MV Boli"/>
+        <a:font script="Deva" typeface="Mangal"/>
+        <a:font script="Telu" typeface="Gautami"/>
+        <a:font script="Taml" typeface="Latha"/>
+        <a:font script="Syrc" typeface="Estrangelo Edessa"/>
+        <a:font script="Orya" typeface="Kalinga"/>
+        <a:font script="Mlym" typeface="Kartika"/>
+        <a:font script="Laoo" typeface="DokChampa"/>
+        <a:font script="Sinh" typeface="Iskoola Pota"/>
+        <a:font script="Mong" typeface="Mongolian Baiti"/>
+        <a:font script="Viet" typeface="Times New Roman"/>
+        <a:font script="Uigh" typeface="Microsoft Uighur"/>
+        <a:font script="Geor" typeface="Sylfaen"/>
+        <a:font script="Armn" typeface="Arial"/>
+        <a:font script="Bugi" typeface="Leelawadee UI"/>
+        <a:font script="Bopo" typeface="Microsoft JhengHei"/>
+        <a:font script="Java" typeface="Javanese Text"/>
+        <a:font script="Lisu" typeface="Segoe UI"/>
+        <a:font script="Mymr" typeface="Myanmar Text"/>
+        <a:font script="Nkoo" typeface="Ebrima"/>
+        <a:font script="Olck" typeface="Nirmala UI"/>
+        <a:font script="Osma" typeface="Ebrima"/>
+        <a:font script="Phag" typeface="Phagspa"/>
+        <a:font script="Syrn" typeface="Estrangelo Edessa"/>
+        <a:font script="Syrj" typeface="Estrangelo Edessa"/>
+        <a:font script="Syre" typeface="Estrangelo Edessa"/>
+        <a:font script="Sora" typeface="Nirmala UI"/>
+        <a:font script="Tale" typeface="Microsoft Tai Le"/>
+        <a:font script="Talu" typeface="Microsoft New Tai Lue"/>
+        <a:font script="Tfng" typeface="Ebrima"/>
+      </a:majorFont>
+      <a:minorFont>
+        <a:latin typeface="Aptos" panose="02110004020202020204"/>
+        <a:ea typeface=""/>
+        <a:cs typeface=""/>
+        <a:font script="Jpan" typeface="游ゴシック"/>
+        <a:font script="Hang" typeface="맑은 고딕"/>
+        <a:font script="Hans" typeface="等线"/>
+        <a:font script="Hant" typeface="新細明體"/>
+        <a:font script="Arab" typeface="Arial"/>
+        <a:font script="Hebr" typeface="Arial"/>
+        <a:font script="Thai" typeface="Cordia New"/>
+        <a:font script="Ethi" typeface="Nyala"/>
+        <a:font script="Beng" typeface="Vrinda"/>
+        <a:font script="Gujr" typeface="Shruti"/>
+        <a:font script="Khmr" typeface="DaunPenh"/>
+        <a:font script="Knda" typeface="Tunga"/>
+        <a:font script="Guru" typeface="Raavi"/>
+        <a:font script="Cans" typeface="Euphemia"/>
+        <a:font script="Cher" typeface="Plantagenet Cherokee"/>
+        <a:font script="Yiii" typeface="Microsoft Yi Baiti"/>
+        <a:font script="Tibt" typeface="Microsoft Himalaya"/>
+        <a:font script="Thaa" typeface="MV Boli"/>
+        <a:font script="Deva" typeface="Mangal"/>
+        <a:font script="Telu" typeface="Gautami"/>
+        <a:font script="Taml" typeface="Latha"/>
+        <a:font script="Syrc" typeface="Estrangelo Edessa"/>
+        <a:font script="Orya" typeface="Kalinga"/>
+        <a:font script="Mlym" typeface="Kartika"/>
+        <a:font script="Laoo" typeface="DokChampa"/>
+        <a:font script="Sinh" typeface="Iskoola Pota"/>
+        <a:font script="Mong" typeface="Mongolian Baiti"/>
+        <a:font script="Viet" typeface="Arial"/>
+        <a:font script="Uigh" typeface="Microsoft Uighur"/>
+        <a:font script="Geor" typeface="Sylfaen"/>
+        <a:font script="Armn" typeface="Arial"/>
+        <a:font script="Bugi" typeface="Leelawadee UI"/>
+        <a:font script="Bopo" typeface="Microsoft JhengHei"/>
+        <a:font script="Java" typeface="Javanese Text"/>
+        <a:font script="Lisu" typeface="Segoe UI"/>
+        <a:font script="Mymr" typeface="Myanmar Text"/>
+        <a:font script="Nkoo" typeface="Ebrima"/>
+        <a:font script="Olck" typeface="Nirmala UI"/>
+        <a:font script="Osma" typeface="Ebrima"/>
+        <a:font script="Phag" typeface="Phagspa"/>
+        <a:font script="Syrn" typeface="Estrangelo Edessa"/>
+        <a:font script="Syrj" typeface="Estrangelo Edessa"/>
+        <a:font script="Syre" typeface="Estrangelo Edessa"/>
+        <a:font script="Sora" typeface="Nirmala UI"/>
+        <a:font script="Tale" typeface="Microsoft Tai Le"/>
+        <a:font script="Talu" typeface="Microsoft New Tai Lue"/>
+        <a:font script="Tfng" typeface="Ebrima"/>
+      </a:minorFont>
+    </a:fontScheme>
+    <a:fmtScheme name="Office">
+      <a:fillStyleLst>
+        <a:solidFill>
+          <a:schemeClr val="phClr"/>
+        </a:solidFill>
+        <a:gradFill rotWithShape="1">
+          <a:gsLst>
+            <a:gs pos="0">
+              <a:schemeClr val="phClr">
+                <a:lumMod val="110000"/>
+                <a:satMod val="105000"/>
+                <a:tint val="67000"/>
+              </a:schemeClr>
+            </a:gs>
+            <a:gs pos="50000">
+              <a:schemeClr val="phClr">
+                <a:lumMod val="105000"/>
+                <a:satMod val="103000"/>
+                <a:tint val="73000"/>
+              </a:schemeClr>
+            </a:gs>
+            <a:gs pos="100000">
+              <a:schemeClr val="phClr">
+                <a:lumMod val="105000"/>
+                <a:satMod val="109000"/>
+                <a:tint val="81000"/>
+              </a:schemeClr>
+            </a:gs>
+          </a:gsLst>
+          <a:lin ang="5400000" scaled="0"/>
+        </a:gradFill>
+        <a:gradFill rotWithShape="1">
+          <a:gsLst>
+            <a:gs pos="0">
+              <a:schemeClr val="phClr">
+                <a:satMod val="103000"/>
+                <a:lumMod val="102000"/>
+                <a:tint val="94000"/>
+              </a:schemeClr>
+            </a:gs>
+            <a:gs pos="50000">
+              <a:schemeClr val="phClr">
+                <a:satMod val="110000"/>
+                <a:lumMod val="100000"/>
+                <a:shade val="100000"/>
+              </a:schemeClr>
+            </a:gs>
+            <a:gs pos="100000">
+              <a:schemeClr val="phClr">
+                <a:lumMod val="99000"/>
+                <a:satMod val="120000"/>
+                <a:shade val="78000"/>
+              </a:schemeClr>
+            </a:gs>
+          </a:gsLst>
+          <a:lin ang="5400000" scaled="0"/>
+        </a:gradFill>
+      </a:fillStyleLst>
+      <a:lnStyleLst>
+        <a:ln w="12700" cap="flat" cmpd="sng" algn="ctr">
+          <a:solidFill>
+            <a:schemeClr val="phClr"/>
+          </a:solidFill>
+          <a:prstDash val="solid"/>
+          <a:miter lim="800000"/>
+        </a:ln>
+        <a:ln w="19050" cap="flat" cmpd="sng" algn="ctr">
+          <a:solidFill>
+            <a:schemeClr val="phClr"/>
+          </a:solidFill>
+          <a:prstDash val="solid"/>
+          <a:miter lim="800000"/>
+        </a:ln>
+        <a:ln w="25400" cap="flat" cmpd="sng" algn="ctr">
+          <a:solidFill>
+            <a:schemeClr val="phClr"/>
+          </a:solidFill>
+          <a:prstDash val="solid"/>
+          <a:miter lim="800000"/>
+        </a:ln>
+      </a:lnStyleLst>
+      <a:effectStyleLst>
+        <a:effectStyle>
+          <a:effectLst/>
+        </a:effectStyle>
+        <a:effectStyle>
+          <a:effectLst/>
+        </a:effectStyle>
+        <a:effectStyle>
+          <a:effectLst>
+            <a:outerShdw blurRad="57150" dist="19050" dir="5400000" algn="ctr" rotWithShape="0">
+              <a:srgbClr val="000000">
+                <a:alpha val="63000"/>
+              </a:srgbClr>
+            </a:outerShdw>
+          </a:effectLst>
+        </a:effectStyle>
+      </a:effectStyleLst>
+      <a:bgFillStyleLst>
+        <a:solidFill>
+          <a:schemeClr val="phClr"/>
+        </a:solidFill>
+        <a:solidFill>
+          <a:schemeClr val="phClr">
+            <a:tint val="95000"/>
+            <a:satMod val="170000"/>
+          </a:schemeClr>
+        </a:solidFill>
+        <a:gradFill rotWithShape="1">
+          <a:gsLst>
+            <a:gs pos="0">
+              <a:schemeClr val="phClr">
+                <a:tint val="93000"/>
+                <a:satMod val="150000"/>
+                <a:shade val="98000"/>
+                <a:lumMod val="102000"/>
+              </a:schemeClr>
+            </a:gs>
+            <a:gs pos="50000">
+              <a:schemeClr val="phClr">
+                <a:tint val="98000"/>
+                <a:satMod val="130000"/>
+                <a:shade val="90000"/>
+                <a:lumMod val="103000"/>
+              </a:schemeClr>
+            </a:gs>
+            <a:gs pos="100000">
+              <a:schemeClr val="phClr">
+                <a:shade val="63000"/>
+                <a:satMod val="120000"/>
+              </a:schemeClr>
+            </a:gs>
+          </a:gsLst>
+          <a:lin ang="5400000" scaled="0"/>
+        </a:gradFill>
+      </a:bgFillStyleLst>
+    </a:fmtScheme>
+  </a:themeElements>
+  <a:objectDefaults>
+    <a:lnDef>
+      <a:spPr/>
+      <a:bodyPr/>
+      <a:lstStyle/>
+      <a:style>
+        <a:lnRef idx="2">
+          <a:schemeClr val="accent1"/>
+        </a:lnRef>
+        <a:fillRef idx="0">
+          <a:schemeClr val="accent1"/>
+        </a:fillRef>
+        <a:effectRef idx="1">
+          <a:schemeClr val="accent1"/>
+        </a:effectRef>
+        <a:fontRef idx="minor">
+          <a:schemeClr val="tx1"/>
+        </a:fontRef>
+      </a:style>
+    </a:lnDef>
+  </a:objectDefaults>
+  <a:extraClrSchemeLst/>
+  <a:extLst>
+    <a:ext uri="{05A4C25C-085E-4340-85A3-A5531E510DB2}">
+      <thm15:themeFamily xmlns:thm15="http://schemas.microsoft.com/office/thememl/2012/main" name="Office Theme" id="{2E142A2C-CD16-42D6-873A-C26D2A0506FA}" vid="{1BDDFF52-6CD6-40A5-AB3C-68EB2F1E4D0A}"/>
+    </a:ext>
+  </a:extLst>
+</a:theme>
 </file>